--- a/docs/dsh-work-status-intro.pptx
+++ b/docs/dsh-work-status-intro.pptx
@@ -4227,7 +4227,7 @@
                 </a:solidFill>
                 <a:latin typeface="Noto Sans SC"/>
               </a:rPr>
-              <a:t>③ 时间轨</a:t>
+              <a:t>③ 最近的记录</a:t>
             </a:r>
           </a:p>
         </p:txBody>
@@ -4269,7 +4269,7 @@
                 </a:solidFill>
                 <a:latin typeface="Noto Sans SC"/>
               </a:rPr>
-              <a:t>最近的记录按时间排，失败行留红并可直接读原因。</a:t>
+              <a:t>时间倒序、行内给对象与耗时；失败行留红并可直接读原因。</a:t>
             </a:r>
           </a:p>
         </p:txBody>
@@ -4311,7 +4311,7 @@
                 </a:solidFill>
                 <a:latin typeface="Noto Sans SC"/>
               </a:rPr>
-              <a:t>④ 上一轮与日志</a:t>
+              <a:t>④ 更早的记录</a:t>
             </a:r>
           </a:p>
         </p:txBody>
@@ -4353,14 +4353,14 @@
                 </a:solidFill>
                 <a:latin typeface="Noto Sans SC"/>
               </a:rPr>
-              <a:t>上一轮折叠成一行，日志页可翻全部。</a:t>
+              <a:t>「展开本轮历史」看余下几步，右下「日志」翻全部轮次。</a:t>
             </a:r>
           </a:p>
         </p:txBody>
       </p:sp>
       <p:pic>
         <p:nvPicPr>
-          <p:cNvPr id="13" name="Picture 12" descr="panel-light.png"/>
+          <p:cNvPr id="13" name="Picture 12" descr="real-panel-redacted.png"/>
           <p:cNvPicPr>
             <a:picLocks noChangeAspect="1"/>
           </p:cNvPicPr>
@@ -4374,14 +4374,56 @@
         </p:blipFill>
         <p:spPr>
           <a:xfrm>
-            <a:off x="7280382" y="1051560"/>
-            <a:ext cx="4149617" cy="5212080"/>
+            <a:off x="5897879" y="1691640"/>
+            <a:ext cx="5486400" cy="3765176"/>
           </a:xfrm>
           <a:prstGeom prst="rect">
             <a:avLst/>
           </a:prstGeom>
         </p:spPr>
       </p:pic>
+      <p:sp>
+        <p:nvSpPr>
+          <p:cNvPr id="14" name="TextBox 13"/>
+          <p:cNvSpPr txBox="1"/>
+          <p:nvPr/>
+        </p:nvSpPr>
+        <p:spPr>
+          <a:xfrm>
+            <a:off x="5897880" y="5623560"/>
+            <a:ext cx="5486400" cy="365760"/>
+          </a:xfrm>
+          <a:prstGeom prst="rect">
+            <a:avLst/>
+          </a:prstGeom>
+          <a:noFill/>
+        </p:spPr>
+        <p:txBody>
+          <a:bodyPr wrap="square" anchor="t" lIns="0" rIns="0" tIns="0" bIns="0">
+            <a:spAutoFit/>
+          </a:bodyPr>
+          <a:lstStyle/>
+          <a:p>
+            <a:pPr algn="l">
+              <a:lnSpc>
+                <a:spcPct val="135000"/>
+              </a:lnSpc>
+              <a:spcAft>
+                <a:spcPts val="600"/>
+              </a:spcAft>
+            </a:pPr>
+            <a:r>
+              <a:rPr sz="1050" b="0">
+                <a:solidFill>
+                  <a:srgbClr val="9AA0A8"/>
+                </a:solidFill>
+                <a:latin typeface="Noto Sans SC"/>
+              </a:rPr>
+              <a:t>真机截图：侧栏、会话标题与对话已打码</a:t>
+            </a:r>
+          </a:p>
+        </p:txBody>
+      </p:sp>
     </p:spTree>
   </p:cSld>
   <p:clrMapOvr>
